--- a/Team_Concept_Slides.pptx
+++ b/Team_Concept_Slides.pptx
@@ -9624,7 +9624,7 @@
                   <a:srgbClr val="00B4D8"/>
                 </a:solidFill>
               </a:rPr>
-              <a:t>18 papers reviewed — each maps to a specific system component</a:t>
+              <a:t>21 papers reviewed — each maps to a specific system component</a:t>
             </a:r>
           </a:p>
         </p:txBody>
@@ -10445,6 +10445,51 @@
                 </a:solidFill>
               </a:rPr>
               <a:t>▸  Atropos / Hu (2025) — overload fallback: target culprit, not victim</a:t>
+            </a:r>
+          </a:p>
+          <a:p>
+            <a:pPr>
+              <a:spcBef>
+                <a:spcPts val="600"/>
+              </a:spcBef>
+            </a:pPr>
+            <a:r>
+              <a:rPr sz="1050">
+                <a:solidFill>
+                  <a:srgbClr val="CAE9FF"/>
+                </a:solidFill>
+              </a:rPr>
+              <a:t>▸  Borg (Verma 2015) — production-scale overcommit; 20-30% savings from sharing</a:t>
+            </a:r>
+          </a:p>
+          <a:p>
+            <a:pPr>
+              <a:spcBef>
+                <a:spcPts val="600"/>
+              </a:spcBef>
+            </a:pPr>
+            <a:r>
+              <a:rPr sz="1050">
+                <a:solidFill>
+                  <a:srgbClr val="CAE9FF"/>
+                </a:solidFill>
+              </a:rPr>
+              <a:t>▸  Quasar (Delimitrou 2014) — &lt;20% CPU util with static reservations</a:t>
+            </a:r>
+          </a:p>
+          <a:p>
+            <a:pPr>
+              <a:spcBef>
+                <a:spcPts val="600"/>
+              </a:spcBef>
+            </a:pPr>
+            <a:r>
+              <a:rPr sz="1050">
+                <a:solidFill>
+                  <a:srgbClr val="CAE9FF"/>
+                </a:solidFill>
+              </a:rPr>
+              <a:t>▸  Heracles (Lo 2015) — memory contention is primary bottleneck; ~90% util achievable</a:t>
             </a:r>
           </a:p>
         </p:txBody>
@@ -14708,6 +14753,645 @@
                 </a:solidFill>
               </a:rPr>
               <a:t>None — experimental</a:t>
+            </a:r>
+          </a:p>
+        </p:txBody>
+      </p:sp>
+      <p:sp>
+        <p:nvSpPr>
+          <p:cNvPr id="119" name="Rectangle 118"/>
+          <p:cNvSpPr/>
+          <p:nvPr/>
+        </p:nvSpPr>
+        <p:spPr>
+          <a:xfrm>
+            <a:off x="164592" y="6675119"/>
+            <a:ext cx="11823192" cy="283464"/>
+          </a:xfrm>
+          <a:prstGeom prst="rect">
+            <a:avLst/>
+          </a:prstGeom>
+          <a:solidFill>
+            <a:srgbClr val="1A2E44"/>
+          </a:solidFill>
+          <a:ln>
+            <a:noFill/>
+          </a:ln>
+        </p:spPr>
+        <p:style>
+          <a:lnRef idx="1">
+            <a:schemeClr val="accent1"/>
+          </a:lnRef>
+          <a:fillRef idx="3">
+            <a:schemeClr val="accent1"/>
+          </a:fillRef>
+          <a:effectRef idx="2">
+            <a:schemeClr val="accent1"/>
+          </a:effectRef>
+          <a:fontRef idx="minor">
+            <a:schemeClr val="lt1"/>
+          </a:fontRef>
+        </p:style>
+        <p:txBody>
+          <a:bodyPr rtlCol="0" anchor="ctr"/>
+          <a:lstStyle/>
+          <a:p>
+            <a:pPr algn="ctr"/>
+          </a:p>
+        </p:txBody>
+      </p:sp>
+      <p:sp>
+        <p:nvSpPr>
+          <p:cNvPr id="120" name="TextBox 119"/>
+          <p:cNvSpPr txBox="1"/>
+          <p:nvPr/>
+        </p:nvSpPr>
+        <p:spPr>
+          <a:xfrm>
+            <a:off x="201168" y="6702551"/>
+            <a:ext cx="2093976" cy="246888"/>
+          </a:xfrm>
+          <a:prstGeom prst="rect">
+            <a:avLst/>
+          </a:prstGeom>
+          <a:noFill/>
+        </p:spPr>
+        <p:txBody>
+          <a:bodyPr wrap="square">
+            <a:spAutoFit/>
+          </a:bodyPr>
+          <a:lstStyle/>
+          <a:p>
+            <a:pPr algn="l"/>
+            <a:r>
+              <a:rPr sz="850" b="0">
+                <a:solidFill>
+                  <a:srgbClr val="00B4D8"/>
+                </a:solidFill>
+              </a:rPr>
+              <a:t>Borg — Verma 2015</a:t>
+            </a:r>
+          </a:p>
+        </p:txBody>
+      </p:sp>
+      <p:sp>
+        <p:nvSpPr>
+          <p:cNvPr id="121" name="TextBox 120"/>
+          <p:cNvSpPr txBox="1"/>
+          <p:nvPr/>
+        </p:nvSpPr>
+        <p:spPr>
+          <a:xfrm>
+            <a:off x="2377440" y="6702551"/>
+            <a:ext cx="1773936" cy="246888"/>
+          </a:xfrm>
+          <a:prstGeom prst="rect">
+            <a:avLst/>
+          </a:prstGeom>
+          <a:noFill/>
+        </p:spPr>
+        <p:txBody>
+          <a:bodyPr wrap="square">
+            <a:spAutoFit/>
+          </a:bodyPr>
+          <a:lstStyle/>
+          <a:p>
+            <a:pPr algn="l"/>
+            <a:r>
+              <a:rPr sz="850" b="0">
+                <a:solidFill>
+                  <a:srgbClr val="CAE9FF"/>
+                </a:solidFill>
+              </a:rPr>
+              <a:t>Large-scale cluster mgmt; overcommit via sharing</a:t>
+            </a:r>
+          </a:p>
+        </p:txBody>
+      </p:sp>
+      <p:sp>
+        <p:nvSpPr>
+          <p:cNvPr id="122" name="TextBox 121"/>
+          <p:cNvSpPr txBox="1"/>
+          <p:nvPr/>
+        </p:nvSpPr>
+        <p:spPr>
+          <a:xfrm>
+            <a:off x="4233672" y="6702551"/>
+            <a:ext cx="1773936" cy="246888"/>
+          </a:xfrm>
+          <a:prstGeom prst="rect">
+            <a:avLst/>
+          </a:prstGeom>
+          <a:noFill/>
+        </p:spPr>
+        <p:txBody>
+          <a:bodyPr wrap="square">
+            <a:spAutoFit/>
+          </a:bodyPr>
+          <a:lstStyle/>
+          <a:p>
+            <a:pPr algn="l"/>
+            <a:r>
+              <a:rPr sz="850" b="0">
+                <a:solidFill>
+                  <a:srgbClr val="CAE9FF"/>
+                </a:solidFill>
+              </a:rPr>
+              <a:t>Prior art; overcommit justif.</a:t>
+            </a:r>
+          </a:p>
+        </p:txBody>
+      </p:sp>
+      <p:sp>
+        <p:nvSpPr>
+          <p:cNvPr id="123" name="TextBox 122"/>
+          <p:cNvSpPr txBox="1"/>
+          <p:nvPr/>
+        </p:nvSpPr>
+        <p:spPr>
+          <a:xfrm>
+            <a:off x="6089904" y="6702551"/>
+            <a:ext cx="1773936" cy="246888"/>
+          </a:xfrm>
+          <a:prstGeom prst="rect">
+            <a:avLst/>
+          </a:prstGeom>
+          <a:noFill/>
+        </p:spPr>
+        <p:txBody>
+          <a:bodyPr wrap="square">
+            <a:spAutoFit/>
+          </a:bodyPr>
+          <a:lstStyle/>
+          <a:p>
+            <a:pPr algn="l"/>
+            <a:r>
+              <a:rPr sz="850" b="0">
+                <a:solidFill>
+                  <a:srgbClr val="FFD166"/>
+                </a:solidFill>
+              </a:rPr>
+              <a:t>20-30% infra savings evidence</a:t>
+            </a:r>
+          </a:p>
+        </p:txBody>
+      </p:sp>
+      <p:sp>
+        <p:nvSpPr>
+          <p:cNvPr id="124" name="TextBox 123"/>
+          <p:cNvSpPr txBox="1"/>
+          <p:nvPr/>
+        </p:nvSpPr>
+        <p:spPr>
+          <a:xfrm>
+            <a:off x="7946136" y="6702551"/>
+            <a:ext cx="2962656" cy="246888"/>
+          </a:xfrm>
+          <a:prstGeom prst="rect">
+            <a:avLst/>
+          </a:prstGeom>
+          <a:noFill/>
+        </p:spPr>
+        <p:txBody>
+          <a:bodyPr wrap="square">
+            <a:spAutoFit/>
+          </a:bodyPr>
+          <a:lstStyle/>
+          <a:p>
+            <a:pPr algn="l"/>
+            <a:r>
+              <a:rPr sz="850" b="0">
+                <a:solidFill>
+                  <a:srgbClr val="CAE9FF"/>
+                </a:solidFill>
+              </a:rPr>
+              <a:t>None — engineering framework</a:t>
+            </a:r>
+          </a:p>
+        </p:txBody>
+      </p:sp>
+      <p:sp>
+        <p:nvSpPr>
+          <p:cNvPr id="125" name="Rectangle 124"/>
+          <p:cNvSpPr/>
+          <p:nvPr/>
+        </p:nvSpPr>
+        <p:spPr>
+          <a:xfrm>
+            <a:off x="164592" y="6958583"/>
+            <a:ext cx="11823192" cy="283464"/>
+          </a:xfrm>
+          <a:prstGeom prst="rect">
+            <a:avLst/>
+          </a:prstGeom>
+          <a:solidFill>
+            <a:srgbClr val="122235"/>
+          </a:solidFill>
+          <a:ln>
+            <a:noFill/>
+          </a:ln>
+        </p:spPr>
+        <p:style>
+          <a:lnRef idx="1">
+            <a:schemeClr val="accent1"/>
+          </a:lnRef>
+          <a:fillRef idx="3">
+            <a:schemeClr val="accent1"/>
+          </a:fillRef>
+          <a:effectRef idx="2">
+            <a:schemeClr val="accent1"/>
+          </a:effectRef>
+          <a:fontRef idx="minor">
+            <a:schemeClr val="lt1"/>
+          </a:fontRef>
+        </p:style>
+        <p:txBody>
+          <a:bodyPr rtlCol="0" anchor="ctr"/>
+          <a:lstStyle/>
+          <a:p>
+            <a:pPr algn="ctr"/>
+          </a:p>
+        </p:txBody>
+      </p:sp>
+      <p:sp>
+        <p:nvSpPr>
+          <p:cNvPr id="126" name="TextBox 125"/>
+          <p:cNvSpPr txBox="1"/>
+          <p:nvPr/>
+        </p:nvSpPr>
+        <p:spPr>
+          <a:xfrm>
+            <a:off x="201168" y="6986015"/>
+            <a:ext cx="2093976" cy="246888"/>
+          </a:xfrm>
+          <a:prstGeom prst="rect">
+            <a:avLst/>
+          </a:prstGeom>
+          <a:noFill/>
+        </p:spPr>
+        <p:txBody>
+          <a:bodyPr wrap="square">
+            <a:spAutoFit/>
+          </a:bodyPr>
+          <a:lstStyle/>
+          <a:p>
+            <a:pPr algn="l"/>
+            <a:r>
+              <a:rPr sz="850" b="0">
+                <a:solidFill>
+                  <a:srgbClr val="00B4D8"/>
+                </a:solidFill>
+              </a:rPr>
+              <a:t>Quasar — Delimitrou 2014</a:t>
+            </a:r>
+          </a:p>
+        </p:txBody>
+      </p:sp>
+      <p:sp>
+        <p:nvSpPr>
+          <p:cNvPr id="127" name="TextBox 126"/>
+          <p:cNvSpPr txBox="1"/>
+          <p:nvPr/>
+        </p:nvSpPr>
+        <p:spPr>
+          <a:xfrm>
+            <a:off x="2377440" y="6986015"/>
+            <a:ext cx="1773936" cy="246888"/>
+          </a:xfrm>
+          <a:prstGeom prst="rect">
+            <a:avLst/>
+          </a:prstGeom>
+          <a:noFill/>
+        </p:spPr>
+        <p:txBody>
+          <a:bodyPr wrap="square">
+            <a:spAutoFit/>
+          </a:bodyPr>
+          <a:lstStyle/>
+          <a:p>
+            <a:pPr algn="l"/>
+            <a:r>
+              <a:rPr sz="850" b="0">
+                <a:solidFill>
+                  <a:srgbClr val="CAE9FF"/>
+                </a:solidFill>
+              </a:rPr>
+              <a:t>QoS-aware sched.; ML profiling replaces static rsv</a:t>
+            </a:r>
+          </a:p>
+        </p:txBody>
+      </p:sp>
+      <p:sp>
+        <p:nvSpPr>
+          <p:cNvPr id="128" name="TextBox 127"/>
+          <p:cNvSpPr txBox="1"/>
+          <p:nvPr/>
+        </p:nvSpPr>
+        <p:spPr>
+          <a:xfrm>
+            <a:off x="4233672" y="6986015"/>
+            <a:ext cx="1773936" cy="246888"/>
+          </a:xfrm>
+          <a:prstGeom prst="rect">
+            <a:avLst/>
+          </a:prstGeom>
+          <a:noFill/>
+        </p:spPr>
+        <p:txBody>
+          <a:bodyPr wrap="square">
+            <a:spAutoFit/>
+          </a:bodyPr>
+          <a:lstStyle/>
+          <a:p>
+            <a:pPr algn="l"/>
+            <a:r>
+              <a:rPr sz="850" b="0">
+                <a:solidFill>
+                  <a:srgbClr val="CAE9FF"/>
+                </a:solidFill>
+              </a:rPr>
+              <a:t>Underutilization validation</a:t>
+            </a:r>
+          </a:p>
+        </p:txBody>
+      </p:sp>
+      <p:sp>
+        <p:nvSpPr>
+          <p:cNvPr id="129" name="TextBox 128"/>
+          <p:cNvSpPr txBox="1"/>
+          <p:nvPr/>
+        </p:nvSpPr>
+        <p:spPr>
+          <a:xfrm>
+            <a:off x="6089904" y="6986015"/>
+            <a:ext cx="1773936" cy="246888"/>
+          </a:xfrm>
+          <a:prstGeom prst="rect">
+            <a:avLst/>
+          </a:prstGeom>
+          <a:noFill/>
+        </p:spPr>
+        <p:txBody>
+          <a:bodyPr wrap="square">
+            <a:spAutoFit/>
+          </a:bodyPr>
+          <a:lstStyle/>
+          <a:p>
+            <a:pPr algn="l"/>
+            <a:r>
+              <a:rPr sz="850" b="0">
+                <a:solidFill>
+                  <a:srgbClr val="FFD166"/>
+                </a:solidFill>
+              </a:rPr>
+              <a:t>QoS-aware allocation framing</a:t>
+            </a:r>
+          </a:p>
+        </p:txBody>
+      </p:sp>
+      <p:sp>
+        <p:nvSpPr>
+          <p:cNvPr id="130" name="TextBox 129"/>
+          <p:cNvSpPr txBox="1"/>
+          <p:nvPr/>
+        </p:nvSpPr>
+        <p:spPr>
+          <a:xfrm>
+            <a:off x="7946136" y="6986015"/>
+            <a:ext cx="2962656" cy="246888"/>
+          </a:xfrm>
+          <a:prstGeom prst="rect">
+            <a:avLst/>
+          </a:prstGeom>
+          <a:noFill/>
+        </p:spPr>
+        <p:txBody>
+          <a:bodyPr wrap="square">
+            <a:spAutoFit/>
+          </a:bodyPr>
+          <a:lstStyle/>
+          <a:p>
+            <a:pPr algn="l"/>
+            <a:r>
+              <a:rPr sz="850" b="0">
+                <a:solidFill>
+                  <a:srgbClr val="CAE9FF"/>
+                </a:solidFill>
+              </a:rPr>
+              <a:t>Prediction: collab. filtering</a:t>
+            </a:r>
+          </a:p>
+        </p:txBody>
+      </p:sp>
+      <p:sp>
+        <p:nvSpPr>
+          <p:cNvPr id="131" name="Rectangle 130"/>
+          <p:cNvSpPr/>
+          <p:nvPr/>
+        </p:nvSpPr>
+        <p:spPr>
+          <a:xfrm>
+            <a:off x="164592" y="7242047"/>
+            <a:ext cx="11823192" cy="283464"/>
+          </a:xfrm>
+          <a:prstGeom prst="rect">
+            <a:avLst/>
+          </a:prstGeom>
+          <a:solidFill>
+            <a:srgbClr val="1A2E44"/>
+          </a:solidFill>
+          <a:ln>
+            <a:noFill/>
+          </a:ln>
+        </p:spPr>
+        <p:style>
+          <a:lnRef idx="1">
+            <a:schemeClr val="accent1"/>
+          </a:lnRef>
+          <a:fillRef idx="3">
+            <a:schemeClr val="accent1"/>
+          </a:fillRef>
+          <a:effectRef idx="2">
+            <a:schemeClr val="accent1"/>
+          </a:effectRef>
+          <a:fontRef idx="minor">
+            <a:schemeClr val="lt1"/>
+          </a:fontRef>
+        </p:style>
+        <p:txBody>
+          <a:bodyPr rtlCol="0" anchor="ctr"/>
+          <a:lstStyle/>
+          <a:p>
+            <a:pPr algn="ctr"/>
+          </a:p>
+        </p:txBody>
+      </p:sp>
+      <p:sp>
+        <p:nvSpPr>
+          <p:cNvPr id="132" name="TextBox 131"/>
+          <p:cNvSpPr txBox="1"/>
+          <p:nvPr/>
+        </p:nvSpPr>
+        <p:spPr>
+          <a:xfrm>
+            <a:off x="201168" y="7269479"/>
+            <a:ext cx="2093976" cy="246888"/>
+          </a:xfrm>
+          <a:prstGeom prst="rect">
+            <a:avLst/>
+          </a:prstGeom>
+          <a:noFill/>
+        </p:spPr>
+        <p:txBody>
+          <a:bodyPr wrap="square">
+            <a:spAutoFit/>
+          </a:bodyPr>
+          <a:lstStyle/>
+          <a:p>
+            <a:pPr algn="l"/>
+            <a:r>
+              <a:rPr sz="850" b="0">
+                <a:solidFill>
+                  <a:srgbClr val="00B4D8"/>
+                </a:solidFill>
+              </a:rPr>
+              <a:t>Heracles — Lo 2015</a:t>
+            </a:r>
+          </a:p>
+        </p:txBody>
+      </p:sp>
+      <p:sp>
+        <p:nvSpPr>
+          <p:cNvPr id="133" name="TextBox 132"/>
+          <p:cNvSpPr txBox="1"/>
+          <p:nvPr/>
+        </p:nvSpPr>
+        <p:spPr>
+          <a:xfrm>
+            <a:off x="2377440" y="7269479"/>
+            <a:ext cx="1773936" cy="246888"/>
+          </a:xfrm>
+          <a:prstGeom prst="rect">
+            <a:avLst/>
+          </a:prstGeom>
+          <a:noFill/>
+        </p:spPr>
+        <p:txBody>
+          <a:bodyPr wrap="square">
+            <a:spAutoFit/>
+          </a:bodyPr>
+          <a:lstStyle/>
+          <a:p>
+            <a:pPr algn="l"/>
+            <a:r>
+              <a:rPr sz="850" b="0">
+                <a:solidFill>
+                  <a:srgbClr val="CAE9FF"/>
+                </a:solidFill>
+              </a:rPr>
+              <a:t>Memory bandwidth is primary co-location bottleneck</a:t>
+            </a:r>
+          </a:p>
+        </p:txBody>
+      </p:sp>
+      <p:sp>
+        <p:nvSpPr>
+          <p:cNvPr id="134" name="TextBox 133"/>
+          <p:cNvSpPr txBox="1"/>
+          <p:nvPr/>
+        </p:nvSpPr>
+        <p:spPr>
+          <a:xfrm>
+            <a:off x="4233672" y="7269479"/>
+            <a:ext cx="1773936" cy="246888"/>
+          </a:xfrm>
+          <a:prstGeom prst="rect">
+            <a:avLst/>
+          </a:prstGeom>
+          <a:noFill/>
+        </p:spPr>
+        <p:txBody>
+          <a:bodyPr wrap="square">
+            <a:spAutoFit/>
+          </a:bodyPr>
+          <a:lstStyle/>
+          <a:p>
+            <a:pPr algn="l"/>
+            <a:r>
+              <a:rPr sz="850" b="0">
+                <a:solidFill>
+                  <a:srgbClr val="CAE9FF"/>
+                </a:solidFill>
+              </a:rPr>
+              <a:t>Memory-first justification</a:t>
+            </a:r>
+          </a:p>
+        </p:txBody>
+      </p:sp>
+      <p:sp>
+        <p:nvSpPr>
+          <p:cNvPr id="135" name="TextBox 134"/>
+          <p:cNvSpPr txBox="1"/>
+          <p:nvPr/>
+        </p:nvSpPr>
+        <p:spPr>
+          <a:xfrm>
+            <a:off x="6089904" y="7269479"/>
+            <a:ext cx="1773936" cy="246888"/>
+          </a:xfrm>
+          <a:prstGeom prst="rect">
+            <a:avLst/>
+          </a:prstGeom>
+          <a:noFill/>
+        </p:spPr>
+        <p:txBody>
+          <a:bodyPr wrap="square">
+            <a:spAutoFit/>
+          </a:bodyPr>
+          <a:lstStyle/>
+          <a:p>
+            <a:pPr algn="l"/>
+            <a:r>
+              <a:rPr sz="850" b="0">
+                <a:solidFill>
+                  <a:srgbClr val="FFD166"/>
+                </a:solidFill>
+              </a:rPr>
+              <a:t>Memory contention evidence</a:t>
+            </a:r>
+          </a:p>
+        </p:txBody>
+      </p:sp>
+      <p:sp>
+        <p:nvSpPr>
+          <p:cNvPr id="136" name="TextBox 135"/>
+          <p:cNvSpPr txBox="1"/>
+          <p:nvPr/>
+        </p:nvSpPr>
+        <p:spPr>
+          <a:xfrm>
+            <a:off x="7946136" y="7269479"/>
+            <a:ext cx="2962656" cy="246888"/>
+          </a:xfrm>
+          <a:prstGeom prst="rect">
+            <a:avLst/>
+          </a:prstGeom>
+          <a:noFill/>
+        </p:spPr>
+        <p:txBody>
+          <a:bodyPr wrap="square">
+            <a:spAutoFit/>
+          </a:bodyPr>
+          <a:lstStyle/>
+          <a:p>
+            <a:pPr algn="l"/>
+            <a:r>
+              <a:rPr sz="850" b="0">
+                <a:solidFill>
+                  <a:srgbClr val="CAE9FF"/>
+                </a:solidFill>
+              </a:rPr>
+              <a:t>Sched. optimizer: feedback ctrl</a:t>
             </a:r>
           </a:p>
         </p:txBody>
